--- a/_slides/remanies/05. ENU_slides.pptx
+++ b/_slides/remanies/05. ENU_slides.pptx
@@ -894,7 +894,7 @@
           <a:lstStyle/>
           <a:p>
             <a:r>
-              <a:t>Le cœur du module, et la raison pour laquelle ENU.1 ne se réduit pas à une question de syntaxe. Une énumération ne remplace pas seulement des constantes : elle peut porter une partie de la logique, et faire disparaître des conditions.</a:t>
+              <a:t>Le cœur du module, et la raison pour laquelle ENU.1 ne se réduit pas à une question de syntaxe. Une énumération ne remplace pas seulement des constantes : elle peut contenir une partie de la logique, et faire disparaître des conditions.</a:t>
             </a:r>
           </a:p>
         </p:txBody>
@@ -2145,7 +2145,7 @@
           <a:lstStyle/>
           <a:p>
             <a:r>
-              <a:t>Jusqu'ici, l'énumération n'était qu'une liste de noms. Cette section montre qu'elle peut porter des données et des méthodes, ce qui déplace la question de la conception : où placer l'information ?</a:t>
+              <a:t>Jusqu'ici, l'énumération n'était qu'une liste de noms. Cette section montre qu'elle peut contenir des données et des méthodes, ce qui déplace la question de la conception : où placer l'information ?</a:t>
             </a:r>
           </a:p>
         </p:txBody>
@@ -2234,7 +2234,7 @@
           </a:p>
           <a:p>
             <a:r>
-              <a:t>C'est ce mécanisme qu'ENU.3 met en œuvre : le libellé français d'une couleur de carte est porté par la couleur elle-même, et la carte se contente de le demander.</a:t>
+              <a:t>C'est ce mécanisme qu'ENU.3 met en œuvre : le libellé français d'une couleur de carte est connu de la couleur elle-même, et la carte se contente de le demander.</a:t>
             </a:r>
           </a:p>
           <a:p>
@@ -2424,7 +2424,7 @@
           <a:p>
             <a:r>
               <a:rPr lang="fr-BE"/>
-              <a:t>La slide Discount a montré qu'une constante peut porter des données. C'est ce qui permet à PIQUE de connaître son nom français, et à une carte de s'afficher « As de Pique » sans table de correspondance.</a:t>
+              <a:t>La slide Discount a montré qu'une constante peut contenir des données. C'est ce qui permet à PIQUE de connaître son nom français, et à une carte de s'afficher « As de Pique » sans table de correspondance.</a:t>
             </a:r>
           </a:p>
         </p:txBody>
@@ -3003,7 +3003,7 @@
           <a:lstStyle/>
           <a:p>
             <a:r>
-              <a:t>L'exercice réunit tout ce que la section 5 a montré : deux énumérations qui portent un libellé, un constructeur, une méthode, et la construction du jeu par double boucle.</a:t>
+              <a:t>L'exercice réunit tout ce que la section 5 a montré : deux énumérations qui connaissent un libellé, un constructeur, une méthode, et la construction du jeu par double boucle.</a:t>
             </a:r>
           </a:p>
           <a:p>
@@ -3992,7 +3992,7 @@
           <a:lstStyle/>
           <a:p>
             <a:r>
-              <a:t>Le fil rouge applique les deux notions du module à GameHub. Deux énumérations d'abord : le type de jeu, qui porte un libellé lisible par un humain, et le résultat d'une partie, qui vaut victoire du premier joueur, victoire du second ou match nul.</a:t>
+              <a:t>Le fil rouge applique les deux notions du module à GameHub. Deux énumérations d'abord : le type de jeu, qui connaît un libellé lisible par un humain, et le résultat d'une partie, qui vaut victoire du premier joueur, victoire du second ou match nul.</a:t>
             </a:r>
           </a:p>
           <a:p>
@@ -14721,7 +14721,7 @@
           <a:p>
             <a:r>
               <a:rPr sz="4000"/>
-              <a:t>Une enum peut porter des données</a:t>
+              <a:t>Une enum peut contenir des données</a:t>
             </a:r>
           </a:p>
         </p:txBody>
@@ -16090,7 +16090,7 @@
             </a:pPr>
             <a:r>
               <a:rPr lang="fr-BE" sz="2400" dirty="0"/>
-              <a:t>Chaque constante porte son libellé : </a:t>
+              <a:t>Chaque constante connaît son libellé : </a:t>
             </a:r>
             <a:r>
               <a:rPr lang="fr-BE" sz="2000" dirty="0">
@@ -19958,7 +19958,7 @@
             </a:r>
             <a:r>
               <a:rPr sz="2800" dirty="0"/>
-              <a:t> pour porter des données</a:t>
+              <a:t> pour contenir des données</a:t>
             </a:r>
           </a:p>
           <a:p>
@@ -25848,7 +25848,7 @@
                     <a:srgbClr val="FFFFFF"/>
                   </a:solidFill>
                 </a:rPr>
-                <a:t>La partie porte son type et son résultat</a:t>
+                <a:t>La partie connaît son type et son résultat</a:t>
               </a:r>
             </a:p>
             <a:p>

--- a/_slides/remanies/05. ENU_slides.pptx
+++ b/_slides/remanies/05. ENU_slides.pptx
@@ -2234,7 +2234,7 @@
           </a:p>
           <a:p>
             <a:r>
-              <a:t>C'est ce mécanisme qu'ENU.3 met en œuvre : le libellé français d'une couleur de carte est connu de la couleur elle-même, et la carte se contente de le demander.</a:t>
+              <a:t>C'est ce mécanisme qu'ENU.3 met en pratique : le libellé français d'une couleur de carte est connu de la couleur elle-même, et la carte se contente de le demander.</a:t>
             </a:r>
           </a:p>
           <a:p>

--- a/_slides/remanies/05. ENU_slides.pptx
+++ b/_slides/remanies/05. ENU_slides.pptx
@@ -3916,7 +3916,7 @@
           </a:p>
           <a:p>
             <a:r>
-              <a:t>L'énumération déplace cette vérification : ce qui était une convention à respecter devient une règle que le compilateur applique. Voir CC-NOM.4 sur les nombres magiques et CC-NOM.7 sur les noms qui portent leur sens.</a:t>
+              <a:t>L'énumération déplace cette vérification : ce qui était une convention à respecter devient une règle que le compilateur applique. Voir CC-NOM.7 sur les nombres magiques et CC-NOM.1 sur les noms qui communiquent l'intention.</a:t>
             </a:r>
           </a:p>
           <a:p>
